--- a/docs/Colizeum_Agency_обучение.pptx
+++ b/docs/Colizeum_Agency_обучение.pptx
@@ -713,7 +713,7 @@
           <a:p>
             <a:r>
               <a:rPr lang="en-US" dirty="0"/>
-              <a:t>Раньше: «посмотри в документе, я там дописал» → Теперь: тот же лист, статус и комментарий — в строке пункта</a:t>
+              <a:t>Раньше: «посмотри в документе, я там дописал» → Теперь: тот же экран, статус и комментарий — в строке пункта</a:t>
             </a:r>
             <a:endParaRPr lang="en-US" dirty="0"/>
           </a:p>
@@ -4332,7 +4332,7 @@
                 <a:ea typeface="Arial" pitchFamily="34" charset="-122"/>
                 <a:cs typeface="Arial" pitchFamily="34" charset="-120"/>
               </a:rPr>
-              <a:t>Рабочий лист — глазами руководителя проектов</a:t>
+              <a:t>Задачи, вид «По клиентам» — глазами руководителя проектов</a:t>
             </a:r>
             <a:endParaRPr lang="en-US" sz="2300" dirty="0"/>
           </a:p>
@@ -4524,7 +4524,7 @@
                 <a:ea typeface="Calibri" pitchFamily="34" charset="-122"/>
                 <a:cs typeface="Calibri" pitchFamily="34" charset="-120"/>
               </a:rPr>
-              <a:t>Порядок страницы повторяет привычный документ: сводка недели → общая заметка → разбор по клиентам.</a:t>
+              <a:t>В разделе «Задачи» два вида: «Доска» — на чьей стороне мяч, «По клиентам» — недельная сверка. Список задач один и тот же.</a:t>
             </a:r>
             <a:endParaRPr lang="en-US" sz="1150" dirty="0"/>
           </a:p>
@@ -4548,7 +4548,7 @@
                 <a:ea typeface="Calibri" pitchFamily="34" charset="-122"/>
                 <a:cs typeface="Calibri" pitchFamily="34" charset="-120"/>
               </a:rPr>
-              <a:t>Сводка считается, а не пишется: «Красная зона» (просрочка и срочное в ожидании), «Закрыто за неделю», «Сроки недели».</a:t>
+              <a:t>Сводка считается, а не пишется: «Красная зона» (просрочка и срочное в ожидании) и «Закрыто за неделю».</a:t>
             </a:r>
             <a:endParaRPr lang="en-US" sz="1150" dirty="0"/>
           </a:p>
@@ -4596,7 +4596,7 @@
                 <a:ea typeface="Calibri" pitchFamily="34" charset="-122"/>
                 <a:cs typeface="Calibri" pitchFamily="34" charset="-120"/>
               </a:rPr>
-              <a:t>Внутри клиента пункты сгруппированы: «Документы», «Креативы», остальное — «Прочее».</a:t>
+              <a:t>Внутри клиента три части — ровно вопросы сверки: «Сделано за неделю», «Делаем сейчас», «Дальше по сроку».</a:t>
             </a:r>
             <a:endParaRPr lang="en-US" sz="1150" dirty="0"/>
           </a:p>
@@ -4756,7 +4756,7 @@
                 <a:ea typeface="Calibri" pitchFamily="34" charset="-122"/>
                 <a:cs typeface="Calibri" pitchFamily="34" charset="-120"/>
               </a:rPr>
-              <a:t>Второй системы задач не появилось. Пункт из листа — это обычная задача: она же на доске «Задачи» и в «Сегодня», просрочка считается один раз.</a:t>
+              <a:t>Второй системы задач не появилось. Пункт здесь — это обычная задача: она же на доске и в «Сегодня», просрочка считается один раз.</a:t>
             </a:r>
             <a:endParaRPr lang="en-US" sz="1000" dirty="0"/>
           </a:p>
@@ -4780,7 +4780,7 @@
                 <a:ea typeface="Calibri" pitchFamily="34" charset="-122"/>
                 <a:cs typeface="Calibri" pitchFamily="34" charset="-120"/>
               </a:rPr>
-              <a:t>Лист принадлежит руководителю проектов. Менеджер открывает лист своего руководителя, а не заводит свой — иначе получились бы два списка дел по одним клиентам.</a:t>
+              <a:t>Неделя принадлежит руководителю проектов. Менеджер открывает неделю своего руководителя, а не заводит свою — иначе получились бы два списка дел по одним клиентам.</a:t>
             </a:r>
             <a:endParaRPr lang="en-US" sz="1000" dirty="0"/>
           </a:p>
@@ -4910,7 +4910,7 @@
                 <a:ea typeface="Arial" pitchFamily="34" charset="-122"/>
                 <a:cs typeface="Arial" pitchFamily="34" charset="-120"/>
               </a:rPr>
-              <a:t>Рабочий лист — глазами проектного менеджера</a:t>
+              <a:t>Задачи, вид «По клиентам» — глазами проектного менеджера</a:t>
             </a:r>
             <a:endParaRPr lang="en-US" sz="2300" dirty="0"/>
           </a:p>
@@ -5032,7 +5032,7 @@
                 <a:ea typeface="Calibri" pitchFamily="34" charset="-122"/>
                 <a:cs typeface="Calibri" pitchFamily="34" charset="-120"/>
               </a:rPr>
-              <a:t>тот же лист, статус и комментарий — в строке пункта</a:t>
+              <a:t>тот же экран, статус и комментарий — в строке пункта</a:t>
             </a:r>
             <a:endParaRPr lang="en-US" sz="1050" dirty="0"/>
           </a:p>
@@ -5102,7 +5102,7 @@
                 <a:ea typeface="Calibri" pitchFamily="34" charset="-122"/>
                 <a:cs typeface="Calibri" pitchFamily="34" charset="-120"/>
               </a:rPr>
-              <a:t>Менеджер открывает тот же лист и видит то же самое — расхождений между двумя копиями документа больше нет.</a:t>
+              <a:t>Менеджер открывает тот же экран и видит то же самое — расхождений между двумя копиями документа больше нет.</a:t>
             </a:r>
             <a:endParaRPr lang="en-US" sz="1150" dirty="0"/>
           </a:p>
@@ -19148,7 +19148,7 @@
                 <a:ea typeface="Calibri" pitchFamily="34" charset="-122"/>
                 <a:cs typeface="Calibri" pitchFamily="34" charset="-120"/>
               </a:rPr>
-              <a:t>Откройте «Рабочий лист» и пройдите по своим клиентам: обстановка, пункты, сроки.</a:t>
+              <a:t>Откройте «Задачи» → «По клиентам» и пройдите по своим клиентам: обстановка, пункты, сроки.</a:t>
             </a:r>
             <a:endParaRPr lang="en-US" sz="1250" dirty="0"/>
           </a:p>
@@ -19811,7 +19811,7 @@
                 <a:ea typeface="Arial" pitchFamily="34" charset="-122"/>
                 <a:cs typeface="Arial" pitchFamily="34" charset="-120"/>
               </a:rPr>
-              <a:t>Рабочий лист</a:t>
+              <a:t>Задачи, вид «По клиентам»</a:t>
             </a:r>
             <a:endParaRPr lang="en-US" sz="1300" dirty="0"/>
           </a:p>
@@ -20326,7 +20326,7 @@
                 <a:ea typeface="Calibri" pitchFamily="34" charset="-122"/>
                 <a:cs typeface="Calibri" pitchFamily="34" charset="-120"/>
               </a:rPr>
-              <a:t>«Рабочий лист» и «Задачи»</a:t>
+              <a:t>«Задачи»: доска и вид «По клиентам»</a:t>
             </a:r>
             <a:endParaRPr lang="en-US" sz="1050" dirty="0"/>
           </a:p>
